--- a/docs/crosswalk/framework_deck_2026-09-01.pptx
+++ b/docs/crosswalk/framework_deck_2026-09-01.pptx
@@ -3663,6 +3663,17 @@
               <a:t>Measurement template borrowed from the sensor layer's access triad: declared uncertainty (structured fields) vs. surfaced uncertainty (what retrieval delivers) vs. observed preservation (what restatements keep).</a:t>
             </a:r>
           </a:p>
+          <a:p>
+            <a:pPr/>
+            <a:r>
+              <a:rPr b="0" sz="1800">
+                <a:solidFill>
+                  <a:srgbClr val="000000"/>
+                </a:solidFill>
+              </a:rPr>
+              <a:t>Standing rule for any mechanism, old or new: every mechanism is a hypothesis about how machines actually orient. What admits or retires one is observed machine behavior — crawler and edge logs, probe results, citation telemetry — never vintage. MCP/WebMCP-class endpoints are dated frontier candidates under exactly that rule, reported separately and never scored as core unreadiness.</a:t>
+            </a:r>
+          </a:p>
         </p:txBody>
       </p:sp>
     </p:spTree>
@@ -4123,6 +4134,25 @@
                   <a:srgbClr val="000000"/>
                 </a:solidFill>
               </a:rPr>
+              <a:t>The June 2026 FSS assessment work (absorbed, not cited):</a:t>
+            </a:r>
+            <a:r>
+              <a:rPr b="0" sz="1800">
+                <a:solidFill>
+                  <a:srgbClr val="000000"/>
+                </a:solidFill>
+              </a:rPr>
+              <a:t> probe harness, benchmark rubric, three-stream assessment spec, covariate/peer-cohort schema. Imported into this repo with history as `assessment/`; the merged live design is `docs/crosswalk/assessment_protocol.md`. It is the AUTO-tier reference implementation rather than an external comparator.</a:t>
+            </a:r>
+          </a:p>
+          <a:p>
+            <a:pPr/>
+            <a:r>
+              <a:rPr b="1" sz="1800">
+                <a:solidFill>
+                  <a:srgbClr val="000000"/>
+                </a:solidFill>
+              </a:rPr>
               <a:t>Enterprise SEO suites:</a:t>
             </a:r>
             <a:r>
@@ -4991,7 +5021,7 @@
                   <a:srgbClr val="000000"/>
                 </a:solidFill>
               </a:rPr>
-              <a:t>2026 instantiation: design the machine surface first (APIs, MCP/A2A-class agent endpoints, structured markup, llms.txt); derive the human surface from it. Not GUI abolition — derivation order. Section 508 keeps the human surface mandatory.</a:t>
+              <a:t>2026 instantiation, orientation first: the machine surface is the established discovery stack that already works and is already measured — robots exclusion (RFC 9309), sitemaps, well-known URIs (RFC 8615), schema.org Dataset/DataCatalog, DCAT/data.json, content negotiation, persistent identifiers. An agent arriving cold must be able to establish what exists, what it means, how to get it, and what it may do with it. The human surface derives from that. Not GUI abolition — derivation order. Section 508 keeps the human surface mandatory.</a:t>
             </a:r>
           </a:p>
           <a:p>
@@ -5470,7 +5500,7 @@
                 </a:solidFill>
                 <a:latin typeface="Courier New"/>
               </a:rPr>
-              <a:t>      Publication            | machine-first products, metadata, markup, agent endpoints</a:t>
+              <a:t>      Publication            | machine-first products, metadata, markup, discovery surfaces</a:t>
             </a:r>
           </a:p>
           <a:p>
@@ -5686,7 +5716,7 @@
           <a:p>
             <a:pPr/>
             <a:r>
-              <a:rPr b="0" sz="1800">
+              <a:rPr b="0" sz="1700">
                 <a:solidFill>
                   <a:srgbClr val="000000"/>
                 </a:solidFill>
@@ -5697,7 +5727,7 @@
           <a:p>
             <a:pPr/>
             <a:r>
-              <a:rPr b="0" sz="1800">
+              <a:rPr b="0" sz="1700">
                 <a:solidFill>
                   <a:srgbClr val="000000"/>
                 </a:solidFill>
@@ -5708,7 +5738,7 @@
           <a:p>
             <a:pPr/>
             <a:r>
-              <a:rPr b="0" sz="1800">
+              <a:rPr b="0" sz="1700">
                 <a:solidFill>
                   <a:srgbClr val="000000"/>
                 </a:solidFill>
@@ -5719,7 +5749,7 @@
           <a:p>
             <a:pPr/>
             <a:r>
-              <a:rPr b="0" sz="1800">
+              <a:rPr b="0" sz="1700">
                 <a:solidFill>
                   <a:srgbClr val="000000"/>
                 </a:solidFill>
@@ -5730,7 +5760,7 @@
           <a:p>
             <a:pPr/>
             <a:r>
-              <a:rPr b="0" sz="1800">
+              <a:rPr b="0" sz="1700">
                 <a:solidFill>
                   <a:srgbClr val="000000"/>
                 </a:solidFill>
@@ -5741,7 +5771,7 @@
           <a:p>
             <a:pPr/>
             <a:r>
-              <a:rPr b="0" sz="1800">
+              <a:rPr b="0" sz="1700">
                 <a:solidFill>
                   <a:srgbClr val="000000"/>
                 </a:solidFill>
@@ -5752,7 +5782,18 @@
           <a:p>
             <a:pPr/>
             <a:r>
-              <a:rPr b="0" sz="1800">
+              <a:rPr b="0" sz="1700">
+                <a:solidFill>
+                  <a:srgbClr val="000000"/>
+                </a:solidFill>
+              </a:rPr>
+              <a:t>A working in-house reference implementation already exists: an evidence-emitting probe harness (now `assessment/harness/`, imported with its June 2026 history), run against a live Census product. Every probe returns pass/partial/fail and saves the actual response as evidence.</a:t>
+            </a:r>
+          </a:p>
+          <a:p>
+            <a:pPr/>
+            <a:r>
+              <a:rPr b="0" sz="1700">
                 <a:solidFill>
                   <a:srgbClr val="000000"/>
                 </a:solidFill>
